--- a/01 Classes/Aula 05 - Aplicação Cloud Indústria 40 Python IoT Plataforma Nodemcu.pptx
+++ b/01 Classes/Aula 05 - Aplicação Cloud Indústria 40 Python IoT Plataforma Nodemcu.pptx
@@ -6514,7 +6514,7 @@
                 <a:latin typeface="Times New Roman" panose="02020603050405020304" pitchFamily="18" charset="0"/>
                 <a:cs typeface="Times New Roman" panose="02020603050405020304" pitchFamily="18" charset="0"/>
               </a:rPr>
-              <a:t>mesmas características do V2</a:t>
+              <a:t>modelos V2/V3</a:t>
             </a:r>
             <a:r>
               <a:rPr lang="pt-BR" sz="2000" dirty="0">
@@ -9377,7 +9377,7 @@
         <p:spPr>
           <a:xfrm>
             <a:off x="142865" y="1200150"/>
-            <a:ext cx="8865056" cy="3737370"/>
+            <a:ext cx="8865056" cy="3829050"/>
           </a:xfrm>
         </p:spPr>
         <p:txBody>
@@ -9611,6 +9611,37 @@
             <a:pPr marL="0" indent="0" algn="just">
               <a:buNone/>
             </a:pPr>
+            <a:r>
+              <a:rPr lang="pt-BR" sz="2000" b="1" dirty="0">
+                <a:solidFill>
+                  <a:schemeClr val="tx1"/>
+                </a:solidFill>
+                <a:latin typeface="Times New Roman" panose="02020603050405020304" pitchFamily="18" charset="0"/>
+                <a:cs typeface="Times New Roman" panose="02020603050405020304" pitchFamily="18" charset="0"/>
+              </a:rPr>
+              <a:t>	Plataformas</a:t>
+            </a:r>
+            <a:r>
+              <a:rPr lang="pt-BR" sz="2000" dirty="0">
+                <a:solidFill>
+                  <a:schemeClr val="tx1"/>
+                </a:solidFill>
+                <a:latin typeface="Times New Roman" panose="02020603050405020304" pitchFamily="18" charset="0"/>
+                <a:cs typeface="Times New Roman" panose="02020603050405020304" pitchFamily="18" charset="0"/>
+              </a:rPr>
+              <a:t>: </a:t>
+            </a:r>
+            <a:r>
+              <a:rPr lang="pt-BR" sz="2000" dirty="0">
+                <a:solidFill>
+                  <a:schemeClr val="tx1"/>
+                </a:solidFill>
+                <a:latin typeface="Times New Roman" panose="02020603050405020304" pitchFamily="18" charset="0"/>
+                <a:cs typeface="Times New Roman" panose="02020603050405020304" pitchFamily="18" charset="0"/>
+                <a:hlinkClick r:id="rId3"/>
+              </a:rPr>
+              <a:t>https://thingspeak.com/</a:t>
+            </a:r>
             <a:endParaRPr lang="pt-BR" sz="2000" dirty="0">
               <a:solidFill>
                 <a:schemeClr val="tx1"/>
@@ -9624,16 +9655,6 @@
               <a:buNone/>
             </a:pPr>
             <a:r>
-              <a:rPr lang="pt-BR" sz="2000" b="1" dirty="0">
-                <a:solidFill>
-                  <a:schemeClr val="tx1"/>
-                </a:solidFill>
-                <a:latin typeface="Times New Roman" panose="02020603050405020304" pitchFamily="18" charset="0"/>
-                <a:cs typeface="Times New Roman" panose="02020603050405020304" pitchFamily="18" charset="0"/>
-              </a:rPr>
-              <a:t>Plataforma</a:t>
-            </a:r>
-            <a:r>
               <a:rPr lang="pt-BR" sz="2000" dirty="0">
                 <a:solidFill>
                   <a:schemeClr val="tx1"/>
@@ -9641,7 +9662,7 @@
                 <a:latin typeface="Times New Roman" panose="02020603050405020304" pitchFamily="18" charset="0"/>
                 <a:cs typeface="Times New Roman" panose="02020603050405020304" pitchFamily="18" charset="0"/>
               </a:rPr>
-              <a:t>: </a:t>
+              <a:t>				 </a:t>
             </a:r>
             <a:r>
               <a:rPr lang="pt-BR" sz="2000" dirty="0">
@@ -9650,9 +9671,9 @@
                 </a:solidFill>
                 <a:latin typeface="Times New Roman" panose="02020603050405020304" pitchFamily="18" charset="0"/>
                 <a:cs typeface="Times New Roman" panose="02020603050405020304" pitchFamily="18" charset="0"/>
-                <a:hlinkClick r:id="rId3"/>
-              </a:rPr>
-              <a:t>https://thingspeak.com/</a:t>
+                <a:hlinkClick r:id="rId4"/>
+              </a:rPr>
+              <a:t>https://wokwi.com/</a:t>
             </a:r>
             <a:endParaRPr lang="pt-BR" sz="2000" dirty="0">
               <a:solidFill>
@@ -9661,6 +9682,42 @@
               <a:latin typeface="Times New Roman" panose="02020603050405020304" pitchFamily="18" charset="0"/>
               <a:cs typeface="Times New Roman" panose="02020603050405020304" pitchFamily="18" charset="0"/>
             </a:endParaRPr>
+          </a:p>
+          <a:p>
+            <a:pPr marL="0" indent="0" algn="just">
+              <a:buNone/>
+            </a:pPr>
+            <a:r>
+              <a:rPr lang="pt-BR" sz="2000" dirty="0">
+                <a:solidFill>
+                  <a:schemeClr val="tx1"/>
+                </a:solidFill>
+                <a:latin typeface="Times New Roman" panose="02020603050405020304" pitchFamily="18" charset="0"/>
+                <a:cs typeface="Times New Roman" panose="02020603050405020304" pitchFamily="18" charset="0"/>
+              </a:rPr>
+              <a:t>				 </a:t>
+            </a:r>
+            <a:r>
+              <a:rPr lang="pt-BR" sz="2000" dirty="0">
+                <a:solidFill>
+                  <a:schemeClr val="tx1"/>
+                </a:solidFill>
+                <a:latin typeface="Times New Roman" panose="02020603050405020304" pitchFamily="18" charset="0"/>
+                <a:cs typeface="Times New Roman" panose="02020603050405020304" pitchFamily="18" charset="0"/>
+                <a:hlinkClick r:id="rId5"/>
+              </a:rPr>
+              <a:t>https://cloud.arduino.cc/</a:t>
+            </a:r>
+            <a:r>
+              <a:rPr lang="pt-BR" sz="2000" dirty="0">
+                <a:solidFill>
+                  <a:schemeClr val="tx1"/>
+                </a:solidFill>
+                <a:latin typeface="Times New Roman" panose="02020603050405020304" pitchFamily="18" charset="0"/>
+                <a:cs typeface="Times New Roman" panose="02020603050405020304" pitchFamily="18" charset="0"/>
+              </a:rPr>
+              <a:t> 	</a:t>
+            </a:r>
           </a:p>
           <a:p>
             <a:pPr marL="0" indent="0" algn="just">
